--- a/assets/figures-editable/c1-c2/c2-e31.pptx
+++ b/assets/figures-editable/c1-c2/c2-e31.pptx
@@ -7,7 +7,7 @@
   <p:sldIdLst>
     <p:sldId id="256" r:id="rId7"/>
   </p:sldIdLst>
-  <p:sldSz cx="11948160" cy="7924799" type="screen4x3"/>
+  <p:sldSz cx="12191695" cy="6858000" type="screen4x3"/>
   <p:notesSz cx="6858000" cy="9144000"/>
   <p:defaultTextStyle>
     <a:defPPr>
@@ -3098,14 +3098,14 @@
       <p:grpSpPr/>
       <p:sp>
         <p:nvSpPr>
-          <p:cNvPr id="2" name="text1" descr="sci-ppt:C2-E31-001"/>
+          <p:cNvPr id="2" name="C2-E31 text 0" descr="sci-ppt:o000"/>
           <p:cNvSpPr txBox="1"/>
           <p:nvPr/>
         </p:nvSpPr>
         <p:spPr>
           <a:xfrm>
-            <a:off x="316992" y="268224"/>
-            <a:ext cx="11277600" cy="359054"/>
+            <a:off x="274320" y="118872"/>
+            <a:ext cx="11612880" cy="340105"/>
           </a:xfrm>
           <a:prstGeom prst="rect">
             <a:avLst/>
@@ -3114,7 +3114,7 @@
           <a:effectLst/>
         </p:spPr>
         <p:txBody>
-          <a:bodyPr wrap="none" lIns="27432" rIns="27432" tIns="18288" bIns="18288" anchor="ctr">
+          <a:bodyPr wrap="none" lIns="18288" rIns="18288" tIns="18288" bIns="18288" anchor="t">
             <a:spAutoFit/>
           </a:bodyPr>
           <a:lstStyle/>
@@ -3125,35 +3125,423 @@
               </a:spcAft>
             </a:pPr>
             <a:r>
-              <a:rPr sz="1823" b="0" i="0">
+              <a:rPr sz="1900" b="1" i="0">
                 <a:solidFill>
                   <a:srgbClr val="8EDBD4"/>
                 </a:solidFill>
                 <a:latin typeface="Arial"/>
               </a:rPr>
-              <a:t>C2-E31 | Physical-variable diagram</a:t>
-            </a:r>
-          </a:p>
-        </p:txBody>
-      </p:sp>
-      <p:sp>
-        <p:nvSpPr>
-          <p:cNvPr id="3" name="rect2" descr="sci-ppt:C2-E31-002"/>
+              <a:t>C2-E31 · Declared optical-to-heat energy screen</a:t>
+            </a:r>
+          </a:p>
+        </p:txBody>
+      </p:sp>
+      <p:sp>
+        <p:nvSpPr>
+          <p:cNvPr id="3" name="C2-E31 text 1" descr="sci-ppt:o001"/>
+          <p:cNvSpPr txBox="1"/>
+          <p:nvPr/>
+        </p:nvSpPr>
+        <p:spPr>
+          <a:xfrm>
+            <a:off x="457200" y="914400"/>
+            <a:ext cx="10972800" cy="262636"/>
+          </a:xfrm>
+          <a:prstGeom prst="rect">
+            <a:avLst/>
+          </a:prstGeom>
+          <a:noFill/>
+          <a:effectLst/>
+        </p:spPr>
+        <p:txBody>
+          <a:bodyPr wrap="none" lIns="18288" rIns="18288" tIns="18288" bIns="18288" anchor="t">
+            <a:spAutoFit/>
+          </a:bodyPr>
+          <a:lstStyle/>
+          <a:p>
+            <a:pPr algn="l">
+              <a:spcAft>
+                <a:spcPts val="0"/>
+              </a:spcAft>
+            </a:pPr>
+            <a:r>
+              <a:rPr sz="1400" b="1" i="0">
+                <a:solidFill>
+                  <a:srgbClr val="8EDBD4"/>
+                </a:solidFill>
+                <a:latin typeface="Arial"/>
+              </a:rPr>
+              <a:t>From 1 µJ of laser light to the 97.8 nJ the PFC must receive (nJ)</a:t>
+            </a:r>
+          </a:p>
+        </p:txBody>
+      </p:sp>
+      <p:sp>
+        <p:nvSpPr>
+          <p:cNvPr id="4" name="C2-E31 text 2" descr="sci-ppt:o002"/>
+          <p:cNvSpPr txBox="1"/>
+          <p:nvPr/>
+        </p:nvSpPr>
+        <p:spPr>
+          <a:xfrm>
+            <a:off x="457200" y="1481328"/>
+            <a:ext cx="4114800" cy="247142"/>
+          </a:xfrm>
+          <a:prstGeom prst="rect">
+            <a:avLst/>
+          </a:prstGeom>
+          <a:noFill/>
+          <a:effectLst/>
+        </p:spPr>
+        <p:txBody>
+          <a:bodyPr wrap="none" lIns="18288" rIns="18288" tIns="18288" bIns="18288" anchor="t">
+            <a:spAutoFit/>
+          </a:bodyPr>
+          <a:lstStyle/>
+          <a:p>
+            <a:pPr algn="l">
+              <a:spcAft>
+                <a:spcPts val="0"/>
+              </a:spcAft>
+            </a:pPr>
+            <a:r>
+              <a:rPr sz="1300" b="0" i="0">
+                <a:solidFill>
+                  <a:srgbClr val="E7F0F3"/>
+                </a:solidFill>
+                <a:latin typeface="Arial"/>
+              </a:rPr>
+              <a:t>incident E_L</a:t>
+            </a:r>
+          </a:p>
+        </p:txBody>
+      </p:sp>
+      <p:sp>
+        <p:nvSpPr>
+          <p:cNvPr id="5" name="C2-E31 rect 3" descr="sci-ppt:o003"/>
           <p:cNvSpPr/>
           <p:nvPr/>
         </p:nvSpPr>
         <p:spPr>
           <a:xfrm>
-            <a:off x="853440" y="1828800"/>
-            <a:ext cx="3048000" cy="1219200"/>
+            <a:off x="4663440" y="1463040"/>
+            <a:ext cx="5669279" cy="502920"/>
           </a:xfrm>
           <a:prstGeom prst="rect">
+            <a:avLst/>
+          </a:prstGeom>
+          <a:solidFill>
+            <a:srgbClr val="8EDBD4">
+              <a:alpha val="85000"/>
+            </a:srgbClr>
+          </a:solidFill>
+          <a:ln w="12700">
+            <a:solidFill>
+              <a:srgbClr val="8EDBD4">
+                <a:alpha val="85000"/>
+              </a:srgbClr>
+            </a:solidFill>
+          </a:ln>
+          <a:effectLst/>
+        </p:spPr>
+        <p:txBody>
+          <a:bodyPr rtlCol="0" anchor="ctr"/>
+          <a:lstStyle/>
+          <a:p>
+            <a:pPr algn="ctr"/>
+          </a:p>
+        </p:txBody>
+      </p:sp>
+      <p:sp>
+        <p:nvSpPr>
+          <p:cNvPr id="6" name="C2-E31 text 4" descr="sci-ppt:o004"/>
+          <p:cNvSpPr txBox="1"/>
+          <p:nvPr/>
+        </p:nvSpPr>
+        <p:spPr>
+          <a:xfrm>
+            <a:off x="10405872" y="1508760"/>
+            <a:ext cx="1371600" cy="247142"/>
+          </a:xfrm>
+          <a:prstGeom prst="rect">
+            <a:avLst/>
+          </a:prstGeom>
+          <a:noFill/>
+          <a:effectLst/>
+        </p:spPr>
+        <p:txBody>
+          <a:bodyPr wrap="none" lIns="18288" rIns="18288" tIns="18288" bIns="18288" anchor="t">
+            <a:spAutoFit/>
+          </a:bodyPr>
+          <a:lstStyle/>
+          <a:p>
+            <a:pPr algn="l">
+              <a:spcAft>
+                <a:spcPts val="0"/>
+              </a:spcAft>
+            </a:pPr>
+            <a:r>
+              <a:rPr sz="1300" b="1" i="0">
+                <a:solidFill>
+                  <a:srgbClr val="E7F0F3"/>
+                </a:solidFill>
+                <a:latin typeface="Arial"/>
+              </a:rPr>
+              <a:t>1000.0 nJ</a:t>
+            </a:r>
+          </a:p>
+        </p:txBody>
+      </p:sp>
+      <p:sp>
+        <p:nvSpPr>
+          <p:cNvPr id="7" name="C2-E31 text 5" descr="sci-ppt:o005"/>
+          <p:cNvSpPr txBox="1"/>
+          <p:nvPr/>
+        </p:nvSpPr>
+        <p:spPr>
+          <a:xfrm>
+            <a:off x="457200" y="2258568"/>
+            <a:ext cx="4114800" cy="247142"/>
+          </a:xfrm>
+          <a:prstGeom prst="rect">
+            <a:avLst/>
+          </a:prstGeom>
+          <a:noFill/>
+          <a:effectLst/>
+        </p:spPr>
+        <p:txBody>
+          <a:bodyPr wrap="none" lIns="18288" rIns="18288" tIns="18288" bIns="18288" anchor="t">
+            <a:spAutoFit/>
+          </a:bodyPr>
+          <a:lstStyle/>
+          <a:p>
+            <a:pPr algn="l">
+              <a:spcAft>
+                <a:spcPts val="0"/>
+              </a:spcAft>
+            </a:pPr>
+            <a:r>
+              <a:rPr sz="1300" b="0" i="0">
+                <a:solidFill>
+                  <a:srgbClr val="E7F0F3"/>
+                </a:solidFill>
+                <a:latin typeface="Arial"/>
+              </a:rPr>
+              <a:t>absorbed E_abs = f_geo A_λ E_L</a:t>
+            </a:r>
+          </a:p>
+        </p:txBody>
+      </p:sp>
+      <p:sp>
+        <p:nvSpPr>
+          <p:cNvPr id="8" name="C2-E31 rect 6" descr="sci-ppt:o006"/>
+          <p:cNvSpPr/>
+          <p:nvPr/>
+        </p:nvSpPr>
+        <p:spPr>
+          <a:xfrm>
+            <a:off x="4663440" y="2240280"/>
+            <a:ext cx="1269057" cy="502920"/>
+          </a:xfrm>
+          <a:prstGeom prst="rect">
+            <a:avLst/>
+          </a:prstGeom>
+          <a:solidFill>
+            <a:srgbClr val="F2B880">
+              <a:alpha val="85000"/>
+            </a:srgbClr>
+          </a:solidFill>
+          <a:ln w="12700">
+            <a:solidFill>
+              <a:srgbClr val="F2B880">
+                <a:alpha val="85000"/>
+              </a:srgbClr>
+            </a:solidFill>
+          </a:ln>
+          <a:effectLst/>
+        </p:spPr>
+        <p:txBody>
+          <a:bodyPr rtlCol="0" anchor="ctr"/>
+          <a:lstStyle/>
+          <a:p>
+            <a:pPr algn="ctr"/>
+          </a:p>
+        </p:txBody>
+      </p:sp>
+      <p:sp>
+        <p:nvSpPr>
+          <p:cNvPr id="9" name="C2-E31 text 7" descr="sci-ppt:o007"/>
+          <p:cNvSpPr txBox="1"/>
+          <p:nvPr/>
+        </p:nvSpPr>
+        <p:spPr>
+          <a:xfrm>
+            <a:off x="6005649" y="2286000"/>
+            <a:ext cx="1371600" cy="247142"/>
+          </a:xfrm>
+          <a:prstGeom prst="rect">
+            <a:avLst/>
+          </a:prstGeom>
+          <a:noFill/>
+          <a:effectLst/>
+        </p:spPr>
+        <p:txBody>
+          <a:bodyPr wrap="none" lIns="18288" rIns="18288" tIns="18288" bIns="18288" anchor="t">
+            <a:spAutoFit/>
+          </a:bodyPr>
+          <a:lstStyle/>
+          <a:p>
+            <a:pPr algn="l">
+              <a:spcAft>
+                <a:spcPts val="0"/>
+              </a:spcAft>
+            </a:pPr>
+            <a:r>
+              <a:rPr sz="1300" b="1" i="0">
+                <a:solidFill>
+                  <a:srgbClr val="E7F0F3"/>
+                </a:solidFill>
+                <a:latin typeface="Arial"/>
+              </a:rPr>
+              <a:t>223.8 nJ</a:t>
+            </a:r>
+          </a:p>
+        </p:txBody>
+      </p:sp>
+      <p:sp>
+        <p:nvSpPr>
+          <p:cNvPr id="10" name="C2-E31 text 8" descr="sci-ppt:o008"/>
+          <p:cNvSpPr txBox="1"/>
+          <p:nvPr/>
+        </p:nvSpPr>
+        <p:spPr>
+          <a:xfrm>
+            <a:off x="457200" y="3035808"/>
+            <a:ext cx="4114800" cy="247142"/>
+          </a:xfrm>
+          <a:prstGeom prst="rect">
+            <a:avLst/>
+          </a:prstGeom>
+          <a:noFill/>
+          <a:effectLst/>
+        </p:spPr>
+        <p:txBody>
+          <a:bodyPr wrap="none" lIns="18288" rIns="18288" tIns="18288" bIns="18288" anchor="t">
+            <a:spAutoFit/>
+          </a:bodyPr>
+          <a:lstStyle/>
+          <a:p>
+            <a:pPr algn="l">
+              <a:spcAft>
+                <a:spcPts val="0"/>
+              </a:spcAft>
+            </a:pPr>
+            <a:r>
+              <a:rPr sz="1300" b="0" i="0">
+                <a:solidFill>
+                  <a:srgbClr val="E7F0F3"/>
+                </a:solidFill>
+                <a:latin typeface="Arial"/>
+              </a:rPr>
+              <a:t>needed Qₚᵣₑₚ (constant-property)</a:t>
+            </a:r>
+          </a:p>
+        </p:txBody>
+      </p:sp>
+      <p:sp>
+        <p:nvSpPr>
+          <p:cNvPr id="11" name="C2-E31 rect 9" descr="sci-ppt:o009"/>
+          <p:cNvSpPr/>
+          <p:nvPr/>
+        </p:nvSpPr>
+        <p:spPr>
+          <a:xfrm>
+            <a:off x="4663440" y="3017520"/>
+            <a:ext cx="554593" cy="502920"/>
+          </a:xfrm>
+          <a:prstGeom prst="rect">
+            <a:avLst/>
+          </a:prstGeom>
+          <a:solidFill>
+            <a:srgbClr val="F28BA0">
+              <a:alpha val="85000"/>
+            </a:srgbClr>
+          </a:solidFill>
+          <a:ln w="12700">
+            <a:solidFill>
+              <a:srgbClr val="F28BA0">
+                <a:alpha val="85000"/>
+              </a:srgbClr>
+            </a:solidFill>
+          </a:ln>
+          <a:effectLst/>
+        </p:spPr>
+        <p:txBody>
+          <a:bodyPr rtlCol="0" anchor="ctr"/>
+          <a:lstStyle/>
+          <a:p>
+            <a:pPr algn="ctr"/>
+          </a:p>
+        </p:txBody>
+      </p:sp>
+      <p:sp>
+        <p:nvSpPr>
+          <p:cNvPr id="12" name="C2-E31 text 10" descr="sci-ppt:o010"/>
+          <p:cNvSpPr txBox="1"/>
+          <p:nvPr/>
+        </p:nvSpPr>
+        <p:spPr>
+          <a:xfrm>
+            <a:off x="5291185" y="3063240"/>
+            <a:ext cx="1371600" cy="247142"/>
+          </a:xfrm>
+          <a:prstGeom prst="rect">
+            <a:avLst/>
+          </a:prstGeom>
+          <a:noFill/>
+          <a:effectLst/>
+        </p:spPr>
+        <p:txBody>
+          <a:bodyPr wrap="none" lIns="18288" rIns="18288" tIns="18288" bIns="18288" anchor="t">
+            <a:spAutoFit/>
+          </a:bodyPr>
+          <a:lstStyle/>
+          <a:p>
+            <a:pPr algn="l">
+              <a:spcAft>
+                <a:spcPts val="0"/>
+              </a:spcAft>
+            </a:pPr>
+            <a:r>
+              <a:rPr sz="1300" b="1" i="0">
+                <a:solidFill>
+                  <a:srgbClr val="E7F0F3"/>
+                </a:solidFill>
+                <a:latin typeface="Arial"/>
+              </a:rPr>
+              <a:t>97.8 nJ</a:t>
+            </a:r>
+          </a:p>
+        </p:txBody>
+      </p:sp>
+      <p:sp>
+        <p:nvSpPr>
+          <p:cNvPr id="13" name="C2-E31 round_rect 11" descr="sci-ppt:o011"/>
+          <p:cNvSpPr/>
+          <p:nvPr/>
+        </p:nvSpPr>
+        <p:spPr>
+          <a:xfrm>
+            <a:off x="457200" y="3840480"/>
+            <a:ext cx="5486400" cy="1920240"/>
+          </a:xfrm>
+          <a:prstGeom prst="roundRect">
             <a:avLst/>
           </a:prstGeom>
           <a:solidFill>
             <a:srgbClr val="213E4B"/>
           </a:solidFill>
-          <a:ln w="19050">
+          <a:ln w="20320">
             <a:solidFill>
               <a:srgbClr val="B4C7D2"/>
             </a:solidFill>
@@ -3170,14 +3558,14 @@
       </p:sp>
       <p:sp>
         <p:nvSpPr>
-          <p:cNvPr id="4" name="text3" descr="sci-ppt:C2-E31-003"/>
+          <p:cNvPr id="14" name="C2-E31 text 12" descr="sci-ppt:o012"/>
           <p:cNvSpPr txBox="1"/>
           <p:nvPr/>
         </p:nvSpPr>
         <p:spPr>
           <a:xfrm>
-            <a:off x="975360" y="1950720"/>
-            <a:ext cx="2865120" cy="340156"/>
+            <a:off x="594360" y="3913632"/>
+            <a:ext cx="5212080" cy="239395"/>
           </a:xfrm>
           <a:prstGeom prst="rect">
             <a:avLst/>
@@ -3186,7 +3574,7 @@
           <a:effectLst/>
         </p:spPr>
         <p:txBody>
-          <a:bodyPr wrap="none" lIns="27432" rIns="27432" tIns="18288" bIns="18288" anchor="ctr">
+          <a:bodyPr wrap="none" lIns="18288" rIns="18288" tIns="18288" bIns="18288" anchor="t">
             <a:spAutoFit/>
           </a:bodyPr>
           <a:lstStyle/>
@@ -3197,37 +3585,157 @@
               </a:spcAft>
             </a:pPr>
             <a:r>
-              <a:rPr sz="1728" b="0" i="0">
+              <a:rPr sz="1250" b="0" i="0">
                 <a:solidFill>
                   <a:srgbClr val="E7F0F3"/>
                 </a:solidFill>
                 <a:latin typeface="Arial"/>
               </a:rPr>
-              <a:t>Incident optical energy</a:t>
-            </a:r>
-          </a:p>
-        </p:txBody>
-      </p:sp>
-      <p:sp>
-        <p:nvSpPr>
-          <p:cNvPr id="5" name="rect4" descr="sci-ppt:C2-E31-004"/>
+              <a:t>f_geo = 1 − e^(−2(10/20)²) = 0.393469</a:t>
+            </a:r>
+          </a:p>
+        </p:txBody>
+      </p:sp>
+      <p:sp>
+        <p:nvSpPr>
+          <p:cNvPr id="15" name="C2-E31 text 13" descr="sci-ppt:o013"/>
+          <p:cNvSpPr txBox="1"/>
+          <p:nvPr/>
+        </p:nvSpPr>
+        <p:spPr>
+          <a:xfrm>
+            <a:off x="594360" y="4279392"/>
+            <a:ext cx="5212080" cy="239395"/>
+          </a:xfrm>
+          <a:prstGeom prst="rect">
+            <a:avLst/>
+          </a:prstGeom>
+          <a:noFill/>
+          <a:effectLst/>
+        </p:spPr>
+        <p:txBody>
+          <a:bodyPr wrap="none" lIns="18288" rIns="18288" tIns="18288" bIns="18288" anchor="t">
+            <a:spAutoFit/>
+          </a:bodyPr>
+          <a:lstStyle/>
+          <a:p>
+            <a:pPr algn="l">
+              <a:spcAft>
+                <a:spcPts val="0"/>
+              </a:spcAft>
+            </a:pPr>
+            <a:r>
+              <a:rPr sz="1250" b="0" i="0">
+                <a:solidFill>
+                  <a:srgbClr val="E7F0F3"/>
+                </a:solidFill>
+                <a:latin typeface="Arial"/>
+              </a:rPr>
+              <a:t>A_λ = 0.90 × (1 − e^(−1)) = 0.568909</a:t>
+            </a:r>
+          </a:p>
+        </p:txBody>
+      </p:sp>
+      <p:sp>
+        <p:nvSpPr>
+          <p:cNvPr id="16" name="C2-E31 text 14" descr="sci-ppt:o014"/>
+          <p:cNvSpPr txBox="1"/>
+          <p:nvPr/>
+        </p:nvSpPr>
+        <p:spPr>
+          <a:xfrm>
+            <a:off x="594360" y="4645152"/>
+            <a:ext cx="5212080" cy="239395"/>
+          </a:xfrm>
+          <a:prstGeom prst="rect">
+            <a:avLst/>
+          </a:prstGeom>
+          <a:noFill/>
+          <a:effectLst/>
+        </p:spPr>
+        <p:txBody>
+          <a:bodyPr wrap="none" lIns="18288" rIns="18288" tIns="18288" bIns="18288" anchor="t">
+            <a:spAutoFit/>
+          </a:bodyPr>
+          <a:lstStyle/>
+          <a:p>
+            <a:pPr algn="l">
+              <a:spcAft>
+                <a:spcPts val="0"/>
+              </a:spcAft>
+            </a:pPr>
+            <a:r>
+              <a:rPr sz="1250" b="1" i="0">
+                <a:solidFill>
+                  <a:srgbClr val="F2B880"/>
+                </a:solidFill>
+                <a:latin typeface="Arial"/>
+              </a:rPr>
+              <a:t>E_abs = 0.393469 × 0.568909 × 1 µJ = 223.848 nJ</a:t>
+            </a:r>
+          </a:p>
+        </p:txBody>
+      </p:sp>
+      <p:sp>
+        <p:nvSpPr>
+          <p:cNvPr id="17" name="C2-E31 text 15" descr="sci-ppt:o015"/>
+          <p:cNvSpPr txBox="1"/>
+          <p:nvPr/>
+        </p:nvSpPr>
+        <p:spPr>
+          <a:xfrm>
+            <a:off x="594360" y="5120640"/>
+            <a:ext cx="5212080" cy="223900"/>
+          </a:xfrm>
+          <a:prstGeom prst="rect">
+            <a:avLst/>
+          </a:prstGeom>
+          <a:noFill/>
+          <a:effectLst/>
+        </p:spPr>
+        <p:txBody>
+          <a:bodyPr wrap="none" lIns="18288" rIns="18288" tIns="18288" bIns="18288" anchor="t">
+            <a:spAutoFit/>
+          </a:bodyPr>
+          <a:lstStyle/>
+          <a:p>
+            <a:pPr algn="l">
+              <a:spcAft>
+                <a:spcPts val="0"/>
+              </a:spcAft>
+            </a:pPr>
+            <a:r>
+              <a:rPr sz="1150" b="0" i="0">
+                <a:solidFill>
+                  <a:srgbClr val="B4C7D2"/>
+                </a:solidFill>
+                <a:latin typeface="Arial"/>
+              </a:rPr>
+              <a:t>No loss between absorption and PFC is included in this screen.</a:t>
+            </a:r>
+          </a:p>
+        </p:txBody>
+      </p:sp>
+      <p:sp>
+        <p:nvSpPr>
+          <p:cNvPr id="18" name="C2-E31 round_rect 16" descr="sci-ppt:o016"/>
           <p:cNvSpPr/>
           <p:nvPr/>
         </p:nvSpPr>
         <p:spPr>
           <a:xfrm>
-            <a:off x="4450080" y="1828800"/>
-            <a:ext cx="3048000" cy="1219200"/>
-          </a:xfrm>
-          <a:prstGeom prst="rect">
+            <a:off x="6217920" y="3840480"/>
+            <a:ext cx="5486400" cy="1920240"/>
+          </a:xfrm>
+          <a:prstGeom prst="roundRect">
             <a:avLst/>
           </a:prstGeom>
           <a:solidFill>
             <a:srgbClr val="213E4B"/>
           </a:solidFill>
-          <a:ln w="19050">
+          <a:ln w="20320">
             <a:solidFill>
-              <a:srgbClr val="B4C7D2"/>
+              <a:srgbClr val="8EDBD4"/>
             </a:solidFill>
           </a:ln>
           <a:effectLst/>
@@ -3242,14 +3750,14 @@
       </p:sp>
       <p:sp>
         <p:nvSpPr>
-          <p:cNvPr id="6" name="text5" descr="sci-ppt:C2-E31-005"/>
+          <p:cNvPr id="19" name="C2-E31 text 17" descr="sci-ppt:o017"/>
           <p:cNvSpPr txBox="1"/>
           <p:nvPr/>
         </p:nvSpPr>
         <p:spPr>
           <a:xfrm>
-            <a:off x="4572000" y="1950720"/>
-            <a:ext cx="2865120" cy="340156"/>
+            <a:off x="6327648" y="3895344"/>
+            <a:ext cx="5266944" cy="247142"/>
           </a:xfrm>
           <a:prstGeom prst="rect">
             <a:avLst/>
@@ -3258,7 +3766,7 @@
           <a:effectLst/>
         </p:spPr>
         <p:txBody>
-          <a:bodyPr wrap="none" lIns="27432" rIns="27432" tIns="18288" bIns="18288" anchor="ctr">
+          <a:bodyPr wrap="none" lIns="18288" rIns="18288" tIns="18288" bIns="18288" anchor="t">
             <a:spAutoFit/>
           </a:bodyPr>
           <a:lstStyle/>
@@ -3269,59 +3777,67 @@
               </a:spcAft>
             </a:pPr>
             <a:r>
-              <a:rPr sz="1728" b="0" i="0">
+              <a:rPr sz="1300" b="1" i="0">
+                <a:solidFill>
+                  <a:srgbClr val="8EDBD4"/>
+                </a:solidFill>
+                <a:latin typeface="Arial"/>
+              </a:rPr>
+              <a:t>Minimum heat-delivery fraction</a:t>
+            </a:r>
+          </a:p>
+        </p:txBody>
+      </p:sp>
+      <p:sp>
+        <p:nvSpPr>
+          <p:cNvPr id="20" name="C2-E31 text 18" descr="sci-ppt:o018"/>
+          <p:cNvSpPr txBox="1"/>
+          <p:nvPr/>
+        </p:nvSpPr>
+        <p:spPr>
+          <a:xfrm>
+            <a:off x="6355080" y="4224528"/>
+            <a:ext cx="5212080" cy="239395"/>
+          </a:xfrm>
+          <a:prstGeom prst="rect">
+            <a:avLst/>
+          </a:prstGeom>
+          <a:noFill/>
+          <a:effectLst/>
+        </p:spPr>
+        <p:txBody>
+          <a:bodyPr wrap="none" lIns="18288" rIns="18288" tIns="18288" bIns="18288" anchor="t">
+            <a:spAutoFit/>
+          </a:bodyPr>
+          <a:lstStyle/>
+          <a:p>
+            <a:pPr algn="l">
+              <a:spcAft>
+                <a:spcPts val="0"/>
+              </a:spcAft>
+            </a:pPr>
+            <a:r>
+              <a:rPr sz="1250" b="1" i="0">
                 <a:solidFill>
                   <a:srgbClr val="E7F0F3"/>
                 </a:solidFill>
                 <a:latin typeface="Arial"/>
               </a:rPr>
-              <a:t>Absorbed: 223.848 nJ</a:t>
-            </a:r>
-          </a:p>
-        </p:txBody>
-      </p:sp>
-      <p:sp>
-        <p:nvSpPr>
-          <p:cNvPr id="7" name="rect6" descr="sci-ppt:C2-E31-006"/>
-          <p:cNvSpPr/>
-          <p:nvPr/>
-        </p:nvSpPr>
-        <p:spPr>
-          <a:xfrm>
-            <a:off x="8046720" y="1828800"/>
-            <a:ext cx="3048000" cy="1219200"/>
-          </a:xfrm>
-          <a:prstGeom prst="rect">
-            <a:avLst/>
-          </a:prstGeom>
-          <a:solidFill>
-            <a:srgbClr val="213E4B"/>
-          </a:solidFill>
-          <a:ln w="19050">
-            <a:solidFill>
-              <a:srgbClr val="B4C7D2"/>
-            </a:solidFill>
-          </a:ln>
-          <a:effectLst/>
-        </p:spPr>
-        <p:txBody>
-          <a:bodyPr rtlCol="0" anchor="ctr"/>
-          <a:lstStyle/>
-          <a:p>
-            <a:pPr algn="ctr"/>
-          </a:p>
-        </p:txBody>
-      </p:sp>
-      <p:sp>
-        <p:nvSpPr>
-          <p:cNvPr id="8" name="text7" descr="sci-ppt:C2-E31-007"/>
+              <a:t>ηₜₕ,min = Qₚᵣₑₚ / E_abs = 97.8243 / 223.848 = 0.437012</a:t>
+            </a:r>
+          </a:p>
+        </p:txBody>
+      </p:sp>
+      <p:sp>
+        <p:nvSpPr>
+          <p:cNvPr id="21" name="C2-E31 text 19" descr="sci-ppt:o019"/>
           <p:cNvSpPr txBox="1"/>
           <p:nvPr/>
         </p:nvSpPr>
         <p:spPr>
           <a:xfrm>
-            <a:off x="8168640" y="1950720"/>
-            <a:ext cx="2865120" cy="340156"/>
+            <a:off x="6355080" y="4754880"/>
+            <a:ext cx="5212080" cy="448563"/>
           </a:xfrm>
           <a:prstGeom prst="rect">
             <a:avLst/>
@@ -3330,7 +3846,7 @@
           <a:effectLst/>
         </p:spPr>
         <p:txBody>
-          <a:bodyPr wrap="none" lIns="27432" rIns="27432" tIns="18288" bIns="18288" anchor="ctr">
+          <a:bodyPr wrap="none" lIns="18288" rIns="18288" tIns="18288" bIns="18288" anchor="t">
             <a:spAutoFit/>
           </a:bodyPr>
           <a:lstStyle/>
@@ -3341,75 +3857,43 @@
               </a:spcAft>
             </a:pPr>
             <a:r>
-              <a:rPr sz="1728" b="0" i="0">
+              <a:rPr sz="1300" b="1" i="0">
                 <a:solidFill>
-                  <a:srgbClr val="E7F0F3"/>
+                  <a:srgbClr val="F2B880"/>
                 </a:solidFill>
                 <a:latin typeface="Arial"/>
               </a:rPr>
-              <a:t>PFC prep: 97.8243 nJ</a:t>
-            </a:r>
-          </a:p>
-        </p:txBody>
-      </p:sp>
-      <p:cxnSp>
-        <p:nvCxnSpPr>
-          <p:cNvPr id="9" name="arrow8" descr="sci-ppt:C2-E31-008"/>
-          <p:cNvCxnSpPr/>
-          <p:nvPr/>
-        </p:nvCxnSpPr>
-        <p:spPr>
-          <a:xfrm>
-            <a:off x="3962399" y="2438400"/>
-            <a:ext cx="365761" cy="0"/>
-          </a:xfrm>
-          <a:prstGeom prst="line">
-            <a:avLst/>
-          </a:prstGeom>
-          <a:ln w="25400">
-            <a:solidFill>
-              <a:srgbClr val="8EDBD4"/>
-            </a:solidFill>
-            <a:headEnd type="none" w="med" len="med"/>
-            <a:tailEnd type="triangle" w="med" len="med"/>
-          </a:ln>
-          <a:effectLst/>
-        </p:spPr>
-      </p:cxnSp>
-      <p:cxnSp>
-        <p:nvCxnSpPr>
-          <p:cNvPr id="10" name="arrow9" descr="sci-ppt:C2-E31-009"/>
-          <p:cNvCxnSpPr/>
-          <p:nvPr/>
-        </p:nvCxnSpPr>
-        <p:spPr>
-          <a:xfrm>
-            <a:off x="7559040" y="2438400"/>
-            <a:ext cx="365759" cy="0"/>
-          </a:xfrm>
-          <a:prstGeom prst="line">
-            <a:avLst/>
-          </a:prstGeom>
-          <a:ln w="25400">
-            <a:solidFill>
-              <a:srgbClr val="8EDBD4"/>
-            </a:solidFill>
-            <a:headEnd type="none" w="med" len="med"/>
-            <a:tailEnd type="triangle" w="med" len="med"/>
-          </a:ln>
-          <a:effectLst/>
-        </p:spPr>
-      </p:cxnSp>
-      <p:sp>
-        <p:nvSpPr>
-          <p:cNvPr id="11" name="text10" descr="sci-ppt:C2-E31-010"/>
+              <a:t>At least 43.7 % of the declared absorbed energy must reach</a:t>
+            </a:r>
+          </a:p>
+          <a:p>
+            <a:pPr algn="l">
+              <a:spcAft>
+                <a:spcPts val="0"/>
+              </a:spcAft>
+            </a:pPr>
+            <a:r>
+              <a:rPr sz="1300" b="1" i="0">
+                <a:solidFill>
+                  <a:srgbClr val="F2B880"/>
+                </a:solidFill>
+                <a:latin typeface="Arial"/>
+              </a:rPr>
+              <a:t>the PFC as heat, even with no losses.</a:t>
+            </a:r>
+          </a:p>
+        </p:txBody>
+      </p:sp>
+      <p:sp>
+        <p:nvSpPr>
+          <p:cNvPr id="22" name="C2-E31 text 20" descr="sci-ppt:o020"/>
           <p:cNvSpPr txBox="1"/>
           <p:nvPr/>
         </p:nvSpPr>
         <p:spPr>
           <a:xfrm>
-            <a:off x="1219200" y="3840480"/>
-            <a:ext cx="10363200" cy="359054"/>
+            <a:off x="320040" y="6510528"/>
+            <a:ext cx="11521440" cy="200660"/>
           </a:xfrm>
           <a:prstGeom prst="rect">
             <a:avLst/>
@@ -3418,7 +3902,7 @@
           <a:effectLst/>
         </p:spPr>
         <p:txBody>
-          <a:bodyPr wrap="none" lIns="27432" rIns="27432" tIns="18288" bIns="18288" anchor="ctr">
+          <a:bodyPr wrap="none" lIns="18288" rIns="18288" tIns="18288" bIns="18288" anchor="t">
             <a:spAutoFit/>
           </a:bodyPr>
           <a:lstStyle/>
@@ -3429,413 +3913,13 @@
               </a:spcAft>
             </a:pPr>
             <a:r>
-              <a:rPr sz="1823" b="0" i="0">
-                <a:solidFill>
-                  <a:srgbClr val="E7F0F3"/>
-                </a:solidFill>
-                <a:latin typeface="Arial"/>
-              </a:rPr>
-              <a:t>Required thermal-transfer fraction: at least 0.437012.</a:t>
-            </a:r>
-          </a:p>
-        </p:txBody>
-      </p:sp>
-      <p:sp>
-        <p:nvSpPr>
-          <p:cNvPr id="12" name="text11" descr="sci-ppt:C2-E31-011"/>
-          <p:cNvSpPr txBox="1"/>
-          <p:nvPr/>
-        </p:nvSpPr>
-        <p:spPr>
-          <a:xfrm>
-            <a:off x="365760" y="4974336"/>
-            <a:ext cx="5547360" cy="321259"/>
-          </a:xfrm>
-          <a:prstGeom prst="rect">
-            <a:avLst/>
-          </a:prstGeom>
-          <a:noFill/>
-          <a:effectLst/>
-        </p:spPr>
-        <p:txBody>
-          <a:bodyPr wrap="none" lIns="27432" rIns="27432" tIns="18288" bIns="18288" anchor="ctr">
-            <a:spAutoFit/>
-          </a:bodyPr>
-          <a:lstStyle/>
-          <a:p>
-            <a:pPr algn="l">
-              <a:spcAft>
-                <a:spcPts val="0"/>
-              </a:spcAft>
-            </a:pPr>
-            <a:r>
-              <a:rPr sz="1632" b="0" i="0">
-                <a:solidFill>
-                  <a:srgbClr val="E7F0F3"/>
-                </a:solidFill>
-                <a:latin typeface="Arial"/>
-              </a:rPr>
-              <a:t>E_L = 1 μJ: incident</a:t>
-            </a:r>
-          </a:p>
-        </p:txBody>
-      </p:sp>
-      <p:sp>
-        <p:nvSpPr>
-          <p:cNvPr id="13" name="text12" descr="sci-ppt:C2-E31-012"/>
-          <p:cNvSpPr txBox="1"/>
-          <p:nvPr/>
-        </p:nvSpPr>
-        <p:spPr>
-          <a:xfrm>
-            <a:off x="365760" y="5266944"/>
-            <a:ext cx="5547360" cy="321259"/>
-          </a:xfrm>
-          <a:prstGeom prst="rect">
-            <a:avLst/>
-          </a:prstGeom>
-          <a:noFill/>
-          <a:effectLst/>
-        </p:spPr>
-        <p:txBody>
-          <a:bodyPr wrap="none" lIns="27432" rIns="27432" tIns="18288" bIns="18288" anchor="ctr">
-            <a:spAutoFit/>
-          </a:bodyPr>
-          <a:lstStyle/>
-          <a:p>
-            <a:pPr algn="l">
-              <a:spcAft>
-                <a:spcPts val="0"/>
-              </a:spcAft>
-            </a:pPr>
-            <a:r>
-              <a:rPr sz="1632" b="0" i="0">
-                <a:solidFill>
-                  <a:srgbClr val="E7F0F3"/>
-                </a:solidFill>
-                <a:latin typeface="Arial"/>
-              </a:rPr>
-              <a:t>A_λ = 0.568909: absorption</a:t>
-            </a:r>
-          </a:p>
-        </p:txBody>
-      </p:sp>
-      <p:sp>
-        <p:nvSpPr>
-          <p:cNvPr id="14" name="text13" descr="sci-ppt:C2-E31-013"/>
-          <p:cNvSpPr txBox="1"/>
-          <p:nvPr/>
-        </p:nvSpPr>
-        <p:spPr>
-          <a:xfrm>
-            <a:off x="365760" y="5559552"/>
-            <a:ext cx="5547360" cy="321259"/>
-          </a:xfrm>
-          <a:prstGeom prst="rect">
-            <a:avLst/>
-          </a:prstGeom>
-          <a:noFill/>
-          <a:effectLst/>
-        </p:spPr>
-        <p:txBody>
-          <a:bodyPr wrap="none" lIns="27432" rIns="27432" tIns="18288" bIns="18288" anchor="ctr">
-            <a:spAutoFit/>
-          </a:bodyPr>
-          <a:lstStyle/>
-          <a:p>
-            <a:pPr algn="l">
-              <a:spcAft>
-                <a:spcPts val="0"/>
-              </a:spcAft>
-            </a:pPr>
-            <a:r>
-              <a:rPr sz="1632" b="0" i="0">
-                <a:solidFill>
-                  <a:srgbClr val="E7F0F3"/>
-                </a:solidFill>
-                <a:latin typeface="Arial"/>
-              </a:rPr>
-              <a:t>Q_prep = 97.8243 nJ: specified PFC preparation</a:t>
-            </a:r>
-          </a:p>
-        </p:txBody>
-      </p:sp>
-      <p:sp>
-        <p:nvSpPr>
-          <p:cNvPr id="15" name="text14" descr="sci-ppt:C2-E31-014"/>
-          <p:cNvSpPr txBox="1"/>
-          <p:nvPr/>
-        </p:nvSpPr>
-        <p:spPr>
-          <a:xfrm>
-            <a:off x="365760" y="5852160"/>
-            <a:ext cx="5547360" cy="321259"/>
-          </a:xfrm>
-          <a:prstGeom prst="rect">
-            <a:avLst/>
-          </a:prstGeom>
-          <a:noFill/>
-          <a:effectLst/>
-        </p:spPr>
-        <p:txBody>
-          <a:bodyPr wrap="none" lIns="27432" rIns="27432" tIns="18288" bIns="18288" anchor="ctr">
-            <a:spAutoFit/>
-          </a:bodyPr>
-          <a:lstStyle/>
-          <a:p>
-            <a:pPr algn="l">
-              <a:spcAft>
-                <a:spcPts val="0"/>
-              </a:spcAft>
-            </a:pPr>
-            <a:r>
-              <a:rPr sz="1632" b="0" i="0">
-                <a:solidFill>
-                  <a:srgbClr val="E7F0F3"/>
-                </a:solidFill>
-                <a:latin typeface="Arial"/>
-              </a:rPr>
-              <a:t>b_a = 10 μm; w = 20 μm</a:t>
-            </a:r>
-          </a:p>
-        </p:txBody>
-      </p:sp>
-      <p:sp>
-        <p:nvSpPr>
-          <p:cNvPr id="16" name="text15" descr="sci-ppt:C2-E31-015"/>
-          <p:cNvSpPr txBox="1"/>
-          <p:nvPr/>
-        </p:nvSpPr>
-        <p:spPr>
-          <a:xfrm>
-            <a:off x="6156960" y="4974336"/>
-            <a:ext cx="5547360" cy="321259"/>
-          </a:xfrm>
-          <a:prstGeom prst="rect">
-            <a:avLst/>
-          </a:prstGeom>
-          <a:noFill/>
-          <a:effectLst/>
-        </p:spPr>
-        <p:txBody>
-          <a:bodyPr wrap="none" lIns="27432" rIns="27432" tIns="18288" bIns="18288" anchor="ctr">
-            <a:spAutoFit/>
-          </a:bodyPr>
-          <a:lstStyle/>
-          <a:p>
-            <a:pPr algn="l">
-              <a:spcAft>
-                <a:spcPts val="0"/>
-              </a:spcAft>
-            </a:pPr>
-            <a:r>
-              <a:rPr sz="1632" b="0" i="0">
-                <a:solidFill>
-                  <a:srgbClr val="E7F0F3"/>
-                </a:solidFill>
-                <a:latin typeface="Arial"/>
-              </a:rPr>
-              <a:t>f_geo = 0.393469: interception</a:t>
-            </a:r>
-          </a:p>
-        </p:txBody>
-      </p:sp>
-      <p:sp>
-        <p:nvSpPr>
-          <p:cNvPr id="17" name="text16" descr="sci-ppt:C2-E31-016"/>
-          <p:cNvSpPr txBox="1"/>
-          <p:nvPr/>
-        </p:nvSpPr>
-        <p:spPr>
-          <a:xfrm>
-            <a:off x="6156960" y="5266944"/>
-            <a:ext cx="5547360" cy="321259"/>
-          </a:xfrm>
-          <a:prstGeom prst="rect">
-            <a:avLst/>
-          </a:prstGeom>
-          <a:noFill/>
-          <a:effectLst/>
-        </p:spPr>
-        <p:txBody>
-          <a:bodyPr wrap="none" lIns="27432" rIns="27432" tIns="18288" bIns="18288" anchor="ctr">
-            <a:spAutoFit/>
-          </a:bodyPr>
-          <a:lstStyle/>
-          <a:p>
-            <a:pPr algn="l">
-              <a:spcAft>
-                <a:spcPts val="0"/>
-              </a:spcAft>
-            </a:pPr>
-            <a:r>
-              <a:rPr sz="1632" b="0" i="0">
-                <a:solidFill>
-                  <a:srgbClr val="E7F0F3"/>
-                </a:solidFill>
-                <a:latin typeface="Arial"/>
-              </a:rPr>
-              <a:t>E_abs = 223.848 nJ: absorber heat</a:t>
-            </a:r>
-          </a:p>
-        </p:txBody>
-      </p:sp>
-      <p:sp>
-        <p:nvSpPr>
-          <p:cNvPr id="18" name="text17" descr="sci-ppt:C2-E31-017"/>
-          <p:cNvSpPr txBox="1"/>
-          <p:nvPr/>
-        </p:nvSpPr>
-        <p:spPr>
-          <a:xfrm>
-            <a:off x="6156960" y="5559552"/>
-            <a:ext cx="5547360" cy="321259"/>
-          </a:xfrm>
-          <a:prstGeom prst="rect">
-            <a:avLst/>
-          </a:prstGeom>
-          <a:noFill/>
-          <a:effectLst/>
-        </p:spPr>
-        <p:txBody>
-          <a:bodyPr wrap="none" lIns="27432" rIns="27432" tIns="18288" bIns="18288" anchor="ctr">
-            <a:spAutoFit/>
-          </a:bodyPr>
-          <a:lstStyle/>
-          <a:p>
-            <a:pPr algn="l">
-              <a:spcAft>
-                <a:spcPts val="0"/>
-              </a:spcAft>
-            </a:pPr>
-            <a:r>
-              <a:rPr sz="1632" b="0" i="0">
-                <a:solidFill>
-                  <a:srgbClr val="E7F0F3"/>
-                </a:solidFill>
-                <a:latin typeface="Arial"/>
-              </a:rPr>
-              <a:t>η_th,min = 0.437012</a:t>
-            </a:r>
-          </a:p>
-        </p:txBody>
-      </p:sp>
-      <p:sp>
-        <p:nvSpPr>
-          <p:cNvPr id="19" name="text18" descr="sci-ppt:C2-E31-018"/>
-          <p:cNvSpPr txBox="1"/>
-          <p:nvPr/>
-        </p:nvSpPr>
-        <p:spPr>
-          <a:xfrm>
-            <a:off x="6156960" y="5852160"/>
-            <a:ext cx="5547360" cy="321259"/>
-          </a:xfrm>
-          <a:prstGeom prst="rect">
-            <a:avLst/>
-          </a:prstGeom>
-          <a:noFill/>
-          <a:effectLst/>
-        </p:spPr>
-        <p:txBody>
-          <a:bodyPr wrap="none" lIns="27432" rIns="27432" tIns="18288" bIns="18288" anchor="ctr">
-            <a:spAutoFit/>
-          </a:bodyPr>
-          <a:lstStyle/>
-          <a:p>
-            <a:pPr algn="l">
-              <a:spcAft>
-                <a:spcPts val="0"/>
-              </a:spcAft>
-            </a:pPr>
-            <a:r>
-              <a:rPr sz="1632" b="0" i="0">
-                <a:solidFill>
-                  <a:srgbClr val="E7F0F3"/>
-                </a:solidFill>
-                <a:latin typeface="Arial"/>
-              </a:rPr>
-              <a:t>μ_a = 2×10⁵ m⁻¹; h_a = 5 μm; ℛ_λ = 0.10</a:t>
-            </a:r>
-          </a:p>
-        </p:txBody>
-      </p:sp>
-      <p:sp>
-        <p:nvSpPr>
-          <p:cNvPr id="20" name="text19" descr="sci-ppt:C2-E31-019"/>
-          <p:cNvSpPr txBox="1"/>
-          <p:nvPr/>
-        </p:nvSpPr>
-        <p:spPr>
-          <a:xfrm>
-            <a:off x="365760" y="6339840"/>
-            <a:ext cx="11277600" cy="302361"/>
-          </a:xfrm>
-          <a:prstGeom prst="rect">
-            <a:avLst/>
-          </a:prstGeom>
-          <a:noFill/>
-          <a:effectLst/>
-        </p:spPr>
-        <p:txBody>
-          <a:bodyPr wrap="none" lIns="27432" rIns="27432" tIns="18288" bIns="18288" anchor="ctr">
-            <a:spAutoFit/>
-          </a:bodyPr>
-          <a:lstStyle/>
-          <a:p>
-            <a:pPr algn="l">
-              <a:spcAft>
-                <a:spcPts val="0"/>
-              </a:spcAft>
-            </a:pPr>
-            <a:r>
-              <a:rPr sz="1536" b="0" i="0">
+              <a:rPr sz="1000" b="0" i="0">
                 <a:solidFill>
                   <a:srgbClr val="B4C7D2"/>
                 </a:solidFill>
                 <a:latin typeface="Arial"/>
               </a:rPr>
-              <a:t>Not all absorbed energy reaches the PFC</a:t>
-            </a:r>
-          </a:p>
-        </p:txBody>
-      </p:sp>
-      <p:sp>
-        <p:nvSpPr>
-          <p:cNvPr id="21" name="text20" descr="sci-ppt:C2-E31-020"/>
-          <p:cNvSpPr txBox="1"/>
-          <p:nvPr/>
-        </p:nvSpPr>
-        <p:spPr>
-          <a:xfrm>
-            <a:off x="365760" y="6632448"/>
-            <a:ext cx="11277600" cy="302361"/>
-          </a:xfrm>
-          <a:prstGeom prst="rect">
-            <a:avLst/>
-          </a:prstGeom>
-          <a:noFill/>
-          <a:effectLst/>
-        </p:spPr>
-        <p:txBody>
-          <a:bodyPr wrap="none" lIns="27432" rIns="27432" tIns="18288" bIns="18288" anchor="ctr">
-            <a:spAutoFit/>
-          </a:bodyPr>
-          <a:lstStyle/>
-          <a:p>
-            <a:pPr algn="l">
-              <a:spcAft>
-                <a:spcPts val="0"/>
-              </a:spcAft>
-            </a:pPr>
-            <a:r>
-              <a:rPr sz="1536" b="0" i="0">
-                <a:solidFill>
-                  <a:srgbClr val="B4C7D2"/>
-                </a:solidFill>
-                <a:latin typeface="Arial"/>
-              </a:rPr>
-              <a:t>A surplus absorber budget is not evidence of nucleation or jetting</a:t>
+              <a:t>Energy screen of Eq. C2-E31; all inputs are declared teaching values.</a:t>
             </a:r>
           </a:p>
         </p:txBody>
